--- a/analysis/slides/卒論発表_実験1実験2.pptx
+++ b/analysis/slides/卒論発表_実験1実験2.pptx
@@ -30,9 +30,10 @@
     <p:sldId id="278" r:id="rId24"/>
     <p:sldId id="279" r:id="rId25"/>
     <p:sldId id="280" r:id="rId26"/>
+    <p:sldId id="281" r:id="rId27"/>
   </p:sldIdLst>
   <p:notesMasterIdLst>
-    <p:notesMasterId r:id="rId27"/>
+    <p:notesMasterId r:id="rId28"/>
   </p:notesMasterIdLst>
   <p:sldSz cx="12192000" cy="6858000"/>
   <p:notesSz cx="6858000" cy="12192000"/>
@@ -1622,6 +1623,369 @@
 </c:chartSpace>
 </file>
 
+<file path=ppt/charts/chart13.xml><?xml version="1.0" encoding="utf-8"?>
+<c:chartSpace xmlns:c="http://schemas.openxmlformats.org/drawingml/2006/chart" xmlns:a="http://schemas.openxmlformats.org/drawingml/2006/main" xmlns:r="http://schemas.openxmlformats.org/officeDocument/2006/relationships">
+  <c:date1904 val="0"/>
+  <c:roundedCorners val="1"/>
+  <c:chart>
+    <c:autoTitleDeleted val="1"/>
+    <c:plotArea>
+      <c:layout/>
+      <c:lineChart>
+        <c:varyColors val="0"/>
+        <c:ser>
+          <c:idx val="0"/>
+          <c:order val="0"/>
+          <c:tx>
+            <c:strRef>
+              <c:f>Sheet1!$B$1</c:f>
+              <c:strCache>
+                <c:ptCount val="1"/>
+                <c:pt idx="0">
+                  <c:v>終日平均血糖</c:v>
+                </c:pt>
+              </c:strCache>
+            </c:strRef>
+          </c:tx>
+          <c:spPr>
+            <a:solidFill>
+              <a:srgbClr val="EB6834"/>
+            </a:solidFill>
+            <a:ln w="28575" cap="flat">
+              <a:solidFill>
+                <a:srgbClr val="EB6834"/>
+              </a:solidFill>
+              <a:prstDash val="solid"/>
+              <a:round/>
+            </a:ln>
+            <a:effectLst/>
+          </c:spPr>
+          <c:invertIfNegative val="0"/>
+          <c:dLbls>
+            <c:numFmt formatCode="#,##0" sourceLinked="0"/>
+            <c:txPr>
+              <a:bodyPr/>
+              <a:lstStyle/>
+              <a:p>
+                <a:pPr>
+                  <a:defRPr b="0" i="0" strike="noStrike" sz="1200" u="none">
+                    <a:solidFill>
+                      <a:srgbClr val="000000"/>
+                    </a:solidFill>
+                    <a:latin typeface="Arial"/>
+                  </a:defRPr>
+                </a:pPr>
+              </a:p>
+            </c:txPr>
+            <c:showLegendKey val="0"/>
+            <c:showVal val="0"/>
+            <c:showCatName val="0"/>
+            <c:showSerName val="0"/>
+            <c:showPercent val="0"/>
+            <c:showBubbleSize val="0"/>
+            <c:showLeaderLines val="0"/>
+          </c:dLbls>
+          <c:marker>
+            <c:symbol val="circle"/>
+            <c:size val="4"/>
+            <c:spPr>
+              <a:solidFill>
+                <a:srgbClr val="EB6834"/>
+              </a:solidFill>
+              <a:ln w="9525" cap="flat">
+                <a:solidFill>
+                  <a:srgbClr val="EB6834"/>
+                </a:solidFill>
+                <a:prstDash val="solid"/>
+                <a:round/>
+              </a:ln>
+              <a:effectLst/>
+            </c:spPr>
+          </c:marker>
+          <c:cat>
+            <c:multiLvlStrRef>
+              <c:f>Sheet1!$A$2:$A$16</c:f>
+              <c:multiLvlStrCache>
+                <c:ptCount val="15"/>
+                <c:lvl>
+                  <c:pt idx="0">
+                    <c:v>準備</c:v>
+                  </c:pt>
+                  <c:pt idx="1">
+                    <c:v>DAY1</c:v>
+                  </c:pt>
+                  <c:pt idx="2">
+                    <c:v>DAY2</c:v>
+                  </c:pt>
+                  <c:pt idx="3">
+                    <c:v>DAY3</c:v>
+                  </c:pt>
+                  <c:pt idx="4">
+                    <c:v>DAY4</c:v>
+                  </c:pt>
+                  <c:pt idx="5">
+                    <c:v>DAY5</c:v>
+                  </c:pt>
+                  <c:pt idx="6">
+                    <c:v>DAY6</c:v>
+                  </c:pt>
+                  <c:pt idx="7">
+                    <c:v>DAY7</c:v>
+                  </c:pt>
+                  <c:pt idx="8">
+                    <c:v>DAY8</c:v>
+                  </c:pt>
+                  <c:pt idx="9">
+                    <c:v>DAY9</c:v>
+                  </c:pt>
+                  <c:pt idx="10">
+                    <c:v>DAY10</c:v>
+                  </c:pt>
+                  <c:pt idx="11">
+                    <c:v>DAY11</c:v>
+                  </c:pt>
+                  <c:pt idx="12">
+                    <c:v>DAY12</c:v>
+                  </c:pt>
+                  <c:pt idx="13">
+                    <c:v>DAY13</c:v>
+                  </c:pt>
+                  <c:pt idx="14">
+                    <c:v>DAY14</c:v>
+                  </c:pt>
+                </c:lvl>
+              </c:multiLvlStrCache>
+            </c:multiLvlStrRef>
+          </c:cat>
+          <c:val>
+            <c:numRef>
+              <c:f>Sheet1!$B$2:$B$16</c:f>
+              <c:numCache>
+                <c:formatCode>General</c:formatCode>
+                <c:ptCount val="15"/>
+                <c:pt idx="0">
+                  <c:v>141.2</c:v>
+                </c:pt>
+                <c:pt idx="1">
+                  <c:v>126.7</c:v>
+                </c:pt>
+                <c:pt idx="2">
+                  <c:v>117.6</c:v>
+                </c:pt>
+                <c:pt idx="3">
+                  <c:v>119</c:v>
+                </c:pt>
+                <c:pt idx="4">
+                  <c:v>126</c:v>
+                </c:pt>
+                <c:pt idx="5">
+                  <c:v>160.7</c:v>
+                </c:pt>
+                <c:pt idx="6">
+                  <c:v>208.9</c:v>
+                </c:pt>
+                <c:pt idx="7">
+                  <c:v>210.8</c:v>
+                </c:pt>
+                <c:pt idx="8">
+                  <c:v>196</c:v>
+                </c:pt>
+                <c:pt idx="9">
+                  <c:v>189.1</c:v>
+                </c:pt>
+                <c:pt idx="10">
+                  <c:v>191</c:v>
+                </c:pt>
+                <c:pt idx="11">
+                  <c:v>204.5</c:v>
+                </c:pt>
+                <c:pt idx="12">
+                  <c:v>187.3</c:v>
+                </c:pt>
+                <c:pt idx="13">
+                  <c:v>174.2</c:v>
+                </c:pt>
+                <c:pt idx="14">
+                  <c:v>184.2</c:v>
+                </c:pt>
+              </c:numCache>
+            </c:numRef>
+          </c:val>
+          <c:smooth val="0"/>
+        </c:ser>
+        <c:dLbls>
+          <c:numFmt formatCode="#,##0" sourceLinked="0"/>
+          <c:txPr>
+            <a:bodyPr/>
+            <a:lstStyle/>
+            <a:p>
+              <a:pPr>
+                <a:defRPr b="0" i="0" strike="noStrike" sz="1200" u="none">
+                  <a:solidFill>
+                    <a:srgbClr val="000000"/>
+                  </a:solidFill>
+                  <a:latin typeface="Arial"/>
+                </a:defRPr>
+              </a:pPr>
+            </a:p>
+          </c:txPr>
+          <c:showLegendKey val="0"/>
+          <c:showVal val="0"/>
+          <c:showCatName val="0"/>
+          <c:showSerName val="0"/>
+          <c:showPercent val="0"/>
+          <c:showBubbleSize val="0"/>
+          <c:showLeaderLines val="0"/>
+        </c:dLbls>
+        <c:marker val="1"/>
+        <c:axId val="2094734554"/>
+        <c:axId val="2094734552"/>
+        <c:axId val="2094734556"/>
+      </c:lineChart>
+      <c:catAx>
+        <c:axId val="2094734554"/>
+        <c:scaling>
+          <c:orientation val="minMax"/>
+        </c:scaling>
+        <c:delete val="0"/>
+        <c:axPos val="b"/>
+        <c:numFmt formatCode="General" sourceLinked="1"/>
+        <c:majorTickMark val="out"/>
+        <c:minorTickMark val="none"/>
+        <c:tickLblPos val="low"/>
+        <c:spPr>
+          <a:ln w="12700" cap="flat">
+            <a:solidFill>
+              <a:srgbClr val="E3E1DB"/>
+            </a:solidFill>
+            <a:prstDash val="solid"/>
+            <a:round/>
+          </a:ln>
+        </c:spPr>
+        <c:txPr>
+          <a:bodyPr/>
+          <a:lstStyle/>
+          <a:p>
+            <a:pPr>
+              <a:defRPr sz="900" b="0" i="0" u="none" strike="noStrike">
+                <a:solidFill>
+                  <a:srgbClr val="5C6570"/>
+                </a:solidFill>
+                <a:latin typeface="Arial"/>
+              </a:defRPr>
+            </a:pPr>
+            <a:endParaRPr lang="en-US"/>
+          </a:p>
+        </c:txPr>
+        <c:crossAx val="2094734552"/>
+        <c:crosses val="autoZero"/>
+        <c:auto val="1"/>
+        <c:lblAlgn val="ctr"/>
+        <c:noMultiLvlLbl val="1"/>
+      </c:catAx>
+      <c:valAx>
+        <c:axId val="2094734552"/>
+        <c:scaling>
+          <c:orientation val="minMax"/>
+        </c:scaling>
+        <c:delete val="0"/>
+        <c:axPos val="l"/>
+        <c:majorGridlines>
+          <c:spPr>
+            <a:ln w="9525" cap="flat">
+              <a:solidFill>
+                <a:srgbClr val="E3E1DB"/>
+              </a:solidFill>
+              <a:prstDash val="solid"/>
+              <a:round/>
+            </a:ln>
+          </c:spPr>
+        </c:majorGridlines>
+        <c:title>
+          <c:tx>
+            <c:rich>
+              <a:bodyPr/>
+              <a:lstStyle/>
+              <a:p>
+                <a:pPr>
+                  <a:defRPr sz="900" b="0" i="0" u="none" strike="noStrike">
+                    <a:solidFill>
+                      <a:srgbClr val="5C6570"/>
+                    </a:solidFill>
+                    <a:latin typeface="Arial"/>
+                  </a:defRPr>
+                </a:pPr>
+                <a:r>
+                  <a:rPr sz="900" b="0" i="0" u="none" strike="noStrike">
+                    <a:solidFill>
+                      <a:srgbClr val="5C6570"/>
+                    </a:solidFill>
+                    <a:latin typeface="Arial"/>
+                  </a:rPr>
+                  <a:t>終日平均血糖(mg/dL)</a:t>
+                </a:r>
+              </a:p>
+            </c:rich>
+          </c:tx>
+          <c:layout/>
+          <c:overlay val="0"/>
+        </c:title>
+        <c:numFmt formatCode="General" sourceLinked="0"/>
+        <c:majorTickMark val="out"/>
+        <c:minorTickMark val="none"/>
+        <c:tickLblPos val="nextTo"/>
+        <c:spPr>
+          <a:ln w="12700" cap="flat">
+            <a:solidFill>
+              <a:srgbClr val="E3E1DB"/>
+            </a:solidFill>
+            <a:prstDash val="solid"/>
+            <a:round/>
+          </a:ln>
+        </c:spPr>
+        <c:txPr>
+          <a:bodyPr/>
+          <a:lstStyle/>
+          <a:p>
+            <a:pPr>
+              <a:defRPr sz="900" b="0" i="0" u="none" strike="noStrike">
+                <a:solidFill>
+                  <a:srgbClr val="5C6570"/>
+                </a:solidFill>
+                <a:latin typeface="Arial"/>
+              </a:defRPr>
+            </a:pPr>
+            <a:endParaRPr lang="en-US"/>
+          </a:p>
+        </c:txPr>
+        <c:crossAx val="2094734554"/>
+        <c:crosses val="autoZero"/>
+        <c:crossBetween val="between"/>
+      </c:valAx>
+      <c:spPr>
+        <a:noFill/>
+        <a:ln>
+          <a:noFill/>
+        </a:ln>
+        <a:effectLst/>
+      </c:spPr>
+    </c:plotArea>
+    <c:plotVisOnly val="1"/>
+    <c:dispBlanksAs val="span"/>
+  </c:chart>
+  <c:spPr>
+    <a:noFill/>
+    <a:ln>
+      <a:noFill/>
+    </a:ln>
+    <a:effectLst/>
+  </c:spPr>
+  <c:externalData r:id="rId1">
+    <c:autoUpdate val="0"/>
+  </c:externalData>
+</c:chartSpace>
+</file>
+
 <file path=ppt/charts/chart2.xml><?xml version="1.0" encoding="utf-8"?>
 <c:chartSpace xmlns:c="http://schemas.openxmlformats.org/drawingml/2006/chart" xmlns:a="http://schemas.openxmlformats.org/drawingml/2006/main" xmlns:r="http://schemas.openxmlformats.org/officeDocument/2006/relationships">
   <c:date1904 val="0"/>
@@ -6282,6 +6646,94 @@
             <a:fld id="{F7021451-1387-4CA6-816F-3879F97B5CBC}" type="slidenum">
               <a:rPr lang="en-US"/>
               <a:t>25</a:t>
+            </a:fld>
+            <a:endParaRPr lang="en-US"/>
+          </a:p>
+        </p:txBody>
+      </p:sp>
+    </p:spTree>
+    <p:extLst>
+      <p:ext uri="{BB962C8B-B14F-4D97-AF65-F5344CB8AC3E}">
+        <p14:creationId xmlns:p14="http://schemas.microsoft.com/office/powerpoint/2010/main" val="1024086991"/>
+      </p:ext>
+    </p:extLst>
+  </p:cSld>
+  <p:clrMapOvr>
+    <a:masterClrMapping/>
+  </p:clrMapOvr>
+</p:notes>
+</file>
+
+<file path=ppt/notesSlides/notesSlide26.xml><?xml version="1.0" encoding="utf-8"?>
+<p:notes xmlns:a="http://schemas.openxmlformats.org/drawingml/2006/main" xmlns:r="http://schemas.openxmlformats.org/officeDocument/2006/relationships" xmlns:p="http://schemas.openxmlformats.org/presentationml/2006/main">
+  <p:cSld>
+    <p:spTree>
+      <p:nvGrpSpPr>
+        <p:cNvPr id="1" name=""/>
+        <p:cNvGrpSpPr/>
+        <p:nvPr/>
+      </p:nvGrpSpPr>
+      <p:grpSpPr>
+        <a:xfrm>
+          <a:off x="0" y="0"/>
+          <a:ext cx="0" cy="0"/>
+          <a:chOff x="0" y="0"/>
+          <a:chExt cx="0" cy="0"/>
+        </a:xfrm>
+      </p:grpSpPr>
+      <p:sp>
+        <p:nvSpPr>
+          <p:cNvPr id="2" name="Slide Image Placeholder 1"/>
+          <p:cNvSpPr>
+            <a:spLocks noGrp="1" noRot="1" noChangeAspect="1"/>
+          </p:cNvSpPr>
+          <p:nvPr>
+            <p:ph type="sldImg"/>
+          </p:nvPr>
+        </p:nvSpPr>
+        <p:spPr/>
+      </p:sp>
+      <p:sp>
+        <p:nvSpPr>
+          <p:cNvPr id="3" name="Notes Placeholder 2"/>
+          <p:cNvSpPr>
+            <a:spLocks noGrp="1"/>
+          </p:cNvSpPr>
+          <p:nvPr>
+            <p:ph type="body" idx="1"/>
+          </p:nvPr>
+        </p:nvSpPr>
+        <p:spPr/>
+        <p:txBody>
+          <a:bodyPr/>
+          <a:lstStyle/>
+          <a:p>
+            <a:r>
+              <a:rPr lang="en-US" dirty="0"/>
+              <a:t/>
+            </a:r>
+            <a:endParaRPr lang="en-US" dirty="0"/>
+          </a:p>
+        </p:txBody>
+      </p:sp>
+      <p:sp>
+        <p:nvSpPr>
+          <p:cNvPr id="4" name="Slide Number Placeholder 3"/>
+          <p:cNvSpPr>
+            <a:spLocks noGrp="1"/>
+          </p:cNvSpPr>
+          <p:nvPr>
+            <p:ph type="sldNum" sz="quarter" idx="10"/>
+          </p:nvPr>
+        </p:nvSpPr>
+        <p:spPr/>
+        <p:txBody>
+          <a:bodyPr/>
+          <a:lstStyle/>
+          <a:p>
+            <a:fld id="{F7021451-1387-4CA6-816F-3879F97B5CBC}" type="slidenum">
+              <a:rPr lang="en-US"/>
+              <a:t>26</a:t>
             </a:fld>
             <a:endParaRPr lang="en-US"/>
           </a:p>
@@ -9000,6 +9452,45 @@
           </a:p>
         </p:txBody>
       </p:sp>
+      <p:sp>
+        <p:nvSpPr>
+          <p:cNvPr id="20" name="Text 18"/>
+          <p:cNvSpPr/>
+          <p:nvPr/>
+        </p:nvSpPr>
+        <p:spPr>
+          <a:xfrm>
+            <a:off x="548640" y="6473952"/>
+            <a:ext cx="11091672" cy="274320"/>
+          </a:xfrm>
+          <a:prstGeom prst="rect">
+            <a:avLst/>
+          </a:prstGeom>
+          <a:noFill/>
+          <a:ln/>
+        </p:spPr>
+        <p:txBody>
+          <a:bodyPr wrap="square" rtlCol="0" anchor="ctr"/>
+          <a:lstStyle/>
+          <a:p>
+            <a:pPr algn="l" indent="0" marL="0">
+              <a:buNone/>
+            </a:pPr>
+            <a:r>
+              <a:rPr lang="en-US" sz="1000" dirty="0">
+                <a:solidFill>
+                  <a:srgbClr val="5C6570"/>
+                </a:solidFill>
+                <a:latin typeface="Calibri" pitchFamily="34" charset="0"/>
+                <a:ea typeface="Calibri" pitchFamily="34" charset="-122"/>
+                <a:cs typeface="Calibri" pitchFamily="34" charset="-120"/>
+              </a:rPr>
+              <a:t>⚠ 総合考察で後述する血糖ベースラインシフトの影響を受けている可能性があり、①②の数値は参考値として扱う。</a:t>
+            </a:r>
+            <a:endParaRPr lang="en-US" sz="1000" dirty="0"/>
+          </a:p>
+        </p:txBody>
+      </p:sp>
     </p:spTree>
   </p:cSld>
   <p:clrMapOvr>
@@ -13330,6 +13821,45 @@
               <a:t>一方で夜間記録では糖質減の日の持久力・爆発力の自己評価が最も低く、血糖データと矛盾する。練習内容・時間の交絡や n=3 のばらつきを含め、追加検証が必要。</a:t>
             </a:r>
             <a:endParaRPr lang="en-US" sz="1200" dirty="0"/>
+          </a:p>
+        </p:txBody>
+      </p:sp>
+      <p:sp>
+        <p:nvSpPr>
+          <p:cNvPr id="20" name="Text 18"/>
+          <p:cNvSpPr/>
+          <p:nvPr/>
+        </p:nvSpPr>
+        <p:spPr>
+          <a:xfrm>
+            <a:off x="548640" y="6473952"/>
+            <a:ext cx="11091672" cy="274320"/>
+          </a:xfrm>
+          <a:prstGeom prst="rect">
+            <a:avLst/>
+          </a:prstGeom>
+          <a:noFill/>
+          <a:ln/>
+        </p:spPr>
+        <p:txBody>
+          <a:bodyPr wrap="square" rtlCol="0" anchor="ctr"/>
+          <a:lstStyle/>
+          <a:p>
+            <a:pPr algn="l" indent="0" marL="0">
+              <a:buNone/>
+            </a:pPr>
+            <a:r>
+              <a:rPr lang="en-US" sz="1000" dirty="0">
+                <a:solidFill>
+                  <a:srgbClr val="5C6570"/>
+                </a:solidFill>
+                <a:latin typeface="Calibri" pitchFamily="34" charset="0"/>
+                <a:ea typeface="Calibri" pitchFamily="34" charset="-122"/>
+                <a:cs typeface="Calibri" pitchFamily="34" charset="-120"/>
+              </a:rPr>
+              <a:t>✓ 実験2は両条件とも血糖ベースラインシフト後で条件が揃っており、この考察（①②③）は信頼できる（総合考察で後述）。</a:t>
+            </a:r>
+            <a:endParaRPr lang="en-US" sz="1000" dirty="0"/>
           </a:p>
         </p:txBody>
       </p:sp>
@@ -16560,7 +17090,7 @@
                 <a:ea typeface="Calibri" pitchFamily="34" charset="-122"/>
                 <a:cs typeface="Calibri" pitchFamily="34" charset="-120"/>
               </a:rPr>
-              <a:t>GENERAL DISCUSSION</a:t>
+              <a:t>NEW FINDING</a:t>
             </a:r>
             <a:endParaRPr lang="en-US" sz="1300" dirty="0"/>
           </a:p>
@@ -16599,7 +17129,7 @@
                 <a:ea typeface="Cambria" pitchFamily="34" charset="-122"/>
                 <a:cs typeface="Cambria" pitchFamily="34" charset="-120"/>
               </a:rPr>
-              <a:t>総合考察まとめ</a:t>
+              <a:t>新知見：血糖ベースラインの持続的シフト</a:t>
             </a:r>
             <a:endParaRPr lang="en-US" sz="2700" dirty="0"/>
           </a:p>
@@ -16607,18 +17137,517 @@
       </p:sp>
       <p:sp>
         <p:nvSpPr>
-          <p:cNvPr id="4" name="Shape 2"/>
+          <p:cNvPr id="4" name="Text 2"/>
+          <p:cNvSpPr txBox="1"/>
+          <p:nvPr/>
+        </p:nvSpPr>
+        <p:spPr>
+          <a:xfrm>
+            <a:off x="548640" y="1463040"/>
+            <a:ext cx="11091672" cy="365760"/>
+          </a:xfrm>
+          <a:prstGeom prst="rect">
+            <a:avLst/>
+          </a:prstGeom>
+          <a:noFill/>
+          <a:ln/>
+        </p:spPr>
+        <p:txBody>
+          <a:bodyPr wrap="square" lIns="0" tIns="0" rIns="0" bIns="0" rtlCol="0" anchor="ctr"/>
+          <a:lstStyle/>
+          <a:p>
+            <a:pPr indent="0" marL="0">
+              <a:buNone/>
+            </a:pPr>
+            <a:r>
+              <a:rPr lang="en-US" sz="1200" dirty="0">
+                <a:solidFill>
+                  <a:srgbClr val="5C6570"/>
+                </a:solidFill>
+                <a:latin typeface="Calibri" pitchFamily="34" charset="0"/>
+                <a:ea typeface="Calibri" pitchFamily="34" charset="-122"/>
+                <a:cs typeface="Calibri" pitchFamily="34" charset="-120"/>
+              </a:rPr>
+              <a:t>その後入手した14日間の連続CGMデータ（FreeStyleリブレ実測）により、実験1・実験2全体の解釈に関わる事実が判明した。</a:t>
+            </a:r>
+            <a:endParaRPr lang="en-US" sz="1200" dirty="0"/>
+          </a:p>
+        </p:txBody>
+      </p:sp>
+      <p:graphicFrame>
+        <p:nvGraphicFramePr>
+          <p:cNvPr id="5" name="Chart 0" descr=""/>
+          <p:cNvGraphicFramePr/>
+          <p:nvPr/>
+        </p:nvGraphicFramePr>
+        <p:xfrm>
+          <a:off x="548640" y="1828800"/>
+          <a:ext cx="11091672" cy="2148840"/>
+        </p:xfrm>
+        <a:graphic xmlns:a="http://schemas.openxmlformats.org/drawingml/2006/main">
+          <a:graphicData uri="http://schemas.openxmlformats.org/drawingml/2006/chart">
+            <c:chart xmlns:c="http://schemas.openxmlformats.org/drawingml/2006/chart" r:id="rId1"/>
+          </a:graphicData>
+        </a:graphic>
+      </p:graphicFrame>
+      <p:graphicFrame>
+        <p:nvGraphicFramePr>
+          <p:cNvPr id="23" name="Table 0"/>
+          <p:cNvGraphicFramePr>
+            <a:graphicFrameLocks noGrp="1"/>
+          </p:cNvGraphicFramePr>
+          <p:nvPr>
+            <p:extLst>
+              <p:ext uri="{D42A27DB-BD31-4B8C-83A1-F6EECF244321}">
+                <p14:modId xmlns:p14="http://schemas.microsoft.com/office/powerpoint/2010/main" val="1579011935"/>
+              </p:ext>
+            </p:extLst>
+          </p:nvPr>
+        </p:nvGraphicFramePr>
+        <p:xfrm>
+          <a:off x="548640" y="4160520"/>
+          <a:ext cx="11091672" cy="1188720"/>
+        </p:xfrm>
+        <a:graphic>
+          <a:graphicData uri="http://schemas.openxmlformats.org/drawingml/2006/table">
+            <a:tbl>
+              <a:tblPr/>
+              <a:tblGrid>
+                <a:gridCol w="4389120"/>
+                <a:gridCol w="7251192"/>
+              </a:tblGrid>
+              <a:tr h="502920">
+                <a:tc>
+                  <a:txBody>
+                    <a:bodyPr/>
+                    <a:lstStyle/>
+                    <a:p>
+                      <a:pPr indent="0" marL="0">
+                        <a:buNone/>
+                      </a:pPr>
+                      <a:r>
+                        <a:rPr lang="en-US" sz="1200" b="1" dirty="0">
+                          <a:solidFill>
+                            <a:srgbClr val="FFFFFF"/>
+                          </a:solidFill>
+                          <a:latin typeface="Calibri" pitchFamily="34" charset="0"/>
+                          <a:ea typeface="Calibri" pitchFamily="34" charset="-122"/>
+                          <a:cs typeface="Calibri" pitchFamily="34" charset="-120"/>
+                        </a:rPr>
+                        <a:t>対応する分析</a:t>
+                      </a:r>
+                      <a:endParaRPr lang="en-US" sz="1200" dirty="0">
+                        <a:latin typeface="Calibri" charset="0"/>
+                        <a:ea typeface="Calibri" charset="0"/>
+                        <a:cs typeface="Calibri" charset="0"/>
+                      </a:endParaRPr>
+                    </a:p>
+                  </a:txBody>
+                  <a:tcPr marL="91440" marR="91440" marT="45720" marB="45720" anchor="ctr">
+                    <a:lnL w="9525" cap="flat" cmpd="sng" algn="ctr">
+                      <a:solidFill>
+                        <a:srgbClr val="E3E1DB"/>
+                      </a:solidFill>
+                      <a:prstDash val="solid"/>
+                      <a:round/>
+                      <a:headEnd type="none" w="med" len="med"/>
+                      <a:tailEnd type="none" w="med" len="med"/>
+                    </a:lnL>
+                    <a:lnR w="9525" cap="flat" cmpd="sng" algn="ctr">
+                      <a:solidFill>
+                        <a:srgbClr val="E3E1DB"/>
+                      </a:solidFill>
+                      <a:prstDash val="solid"/>
+                      <a:round/>
+                      <a:headEnd type="none" w="med" len="med"/>
+                      <a:tailEnd type="none" w="med" len="med"/>
+                    </a:lnR>
+                    <a:lnT w="9525" cap="flat" cmpd="sng" algn="ctr">
+                      <a:solidFill>
+                        <a:srgbClr val="E3E1DB"/>
+                      </a:solidFill>
+                      <a:prstDash val="solid"/>
+                      <a:round/>
+                      <a:headEnd type="none" w="med" len="med"/>
+                      <a:tailEnd type="none" w="med" len="med"/>
+                    </a:lnT>
+                    <a:lnB w="9525" cap="flat" cmpd="sng" algn="ctr">
+                      <a:solidFill>
+                        <a:srgbClr val="E3E1DB"/>
+                      </a:solidFill>
+                      <a:prstDash val="solid"/>
+                      <a:round/>
+                      <a:headEnd type="none" w="med" len="med"/>
+                      <a:tailEnd type="none" w="med" len="med"/>
+                    </a:lnB>
+                    <a:solidFill>
+                      <a:srgbClr val="21295C"/>
+                    </a:solidFill>
+                  </a:tcPr>
+                </a:tc>
+                <a:tc>
+                  <a:txBody>
+                    <a:bodyPr/>
+                    <a:lstStyle/>
+                    <a:p>
+                      <a:pPr indent="0" marL="0">
+                        <a:buNone/>
+                      </a:pPr>
+                      <a:r>
+                        <a:rPr lang="en-US" sz="1200" b="1" dirty="0">
+                          <a:solidFill>
+                            <a:srgbClr val="FFFFFF"/>
+                          </a:solidFill>
+                          <a:latin typeface="Calibri" pitchFamily="34" charset="0"/>
+                          <a:ea typeface="Calibri" pitchFamily="34" charset="-122"/>
+                          <a:cs typeface="Calibri" pitchFamily="34" charset="-120"/>
+                        </a:rPr>
+                        <a:t>シフトとの関係・信頼度</a:t>
+                      </a:r>
+                      <a:endParaRPr lang="en-US" sz="1200" dirty="0">
+                        <a:latin typeface="Calibri" charset="0"/>
+                        <a:ea typeface="Calibri" charset="0"/>
+                        <a:cs typeface="Calibri" charset="0"/>
+                      </a:endParaRPr>
+                    </a:p>
+                  </a:txBody>
+                  <a:tcPr marL="91440" marR="91440" marT="45720" marB="45720" anchor="ctr">
+                    <a:lnL w="9525" cap="flat" cmpd="sng" algn="ctr">
+                      <a:solidFill>
+                        <a:srgbClr val="E3E1DB"/>
+                      </a:solidFill>
+                      <a:prstDash val="solid"/>
+                      <a:round/>
+                      <a:headEnd type="none" w="med" len="med"/>
+                      <a:tailEnd type="none" w="med" len="med"/>
+                    </a:lnL>
+                    <a:lnR w="9525" cap="flat" cmpd="sng" algn="ctr">
+                      <a:solidFill>
+                        <a:srgbClr val="E3E1DB"/>
+                      </a:solidFill>
+                      <a:prstDash val="solid"/>
+                      <a:round/>
+                      <a:headEnd type="none" w="med" len="med"/>
+                      <a:tailEnd type="none" w="med" len="med"/>
+                    </a:lnR>
+                    <a:lnT w="9525" cap="flat" cmpd="sng" algn="ctr">
+                      <a:solidFill>
+                        <a:srgbClr val="E3E1DB"/>
+                      </a:solidFill>
+                      <a:prstDash val="solid"/>
+                      <a:round/>
+                      <a:headEnd type="none" w="med" len="med"/>
+                      <a:tailEnd type="none" w="med" len="med"/>
+                    </a:lnT>
+                    <a:lnB w="9525" cap="flat" cmpd="sng" algn="ctr">
+                      <a:solidFill>
+                        <a:srgbClr val="E3E1DB"/>
+                      </a:solidFill>
+                      <a:prstDash val="solid"/>
+                      <a:round/>
+                      <a:headEnd type="none" w="med" len="med"/>
+                      <a:tailEnd type="none" w="med" len="med"/>
+                    </a:lnB>
+                    <a:solidFill>
+                      <a:srgbClr val="21295C"/>
+                    </a:solidFill>
+                  </a:tcPr>
+                </a:tc>
+              </a:tr>
+              <a:tr h="502920">
+                <a:tc>
+                  <a:txBody>
+                    <a:bodyPr/>
+                    <a:lstStyle/>
+                    <a:p>
+                      <a:pPr indent="0" marL="0">
+                        <a:buNone/>
+                      </a:pPr>
+                      <a:r>
+                        <a:rPr lang="en-US" sz="1200" b="1" dirty="0">
+                          <a:solidFill>
+                            <a:srgbClr val="21295C"/>
+                          </a:solidFill>
+                          <a:latin typeface="Calibri" pitchFamily="34" charset="0"/>
+                          <a:ea typeface="Calibri" pitchFamily="34" charset="-122"/>
+                          <a:cs typeface="Calibri" pitchFamily="34" charset="-120"/>
+                        </a:rPr>
+                        <a:t>実験1（固形 vs スムージー）</a:t>
+                      </a:r>
+                      <a:endParaRPr lang="en-US" sz="1200" dirty="0">
+                        <a:latin typeface="Calibri" charset="0"/>
+                        <a:ea typeface="Calibri" charset="0"/>
+                        <a:cs typeface="Calibri" charset="0"/>
+                      </a:endParaRPr>
+                    </a:p>
+                  </a:txBody>
+                  <a:tcPr marL="91440" marR="91440" marT="45720" marB="45720" anchor="ctr">
+                    <a:lnL w="9525" cap="flat" cmpd="sng" algn="ctr">
+                      <a:solidFill>
+                        <a:srgbClr val="E3E1DB"/>
+                      </a:solidFill>
+                      <a:prstDash val="solid"/>
+                      <a:round/>
+                      <a:headEnd type="none" w="med" len="med"/>
+                      <a:tailEnd type="none" w="med" len="med"/>
+                    </a:lnL>
+                    <a:lnR w="9525" cap="flat" cmpd="sng" algn="ctr">
+                      <a:solidFill>
+                        <a:srgbClr val="E3E1DB"/>
+                      </a:solidFill>
+                      <a:prstDash val="solid"/>
+                      <a:round/>
+                      <a:headEnd type="none" w="med" len="med"/>
+                      <a:tailEnd type="none" w="med" len="med"/>
+                    </a:lnR>
+                    <a:lnT w="9525" cap="flat" cmpd="sng" algn="ctr">
+                      <a:solidFill>
+                        <a:srgbClr val="E3E1DB"/>
+                      </a:solidFill>
+                      <a:prstDash val="solid"/>
+                      <a:round/>
+                      <a:headEnd type="none" w="med" len="med"/>
+                      <a:tailEnd type="none" w="med" len="med"/>
+                    </a:lnT>
+                    <a:lnB w="9525" cap="flat" cmpd="sng" algn="ctr">
+                      <a:solidFill>
+                        <a:srgbClr val="E3E1DB"/>
+                      </a:solidFill>
+                      <a:prstDash val="solid"/>
+                      <a:round/>
+                      <a:headEnd type="none" w="med" len="med"/>
+                      <a:tailEnd type="none" w="med" len="med"/>
+                    </a:lnB>
+                    <a:solidFill>
+                      <a:srgbClr val="FFFFFF"/>
+                    </a:solidFill>
+                  </a:tcPr>
+                </a:tc>
+                <a:tc>
+                  <a:txBody>
+                    <a:bodyPr/>
+                    <a:lstStyle/>
+                    <a:p>
+                      <a:pPr indent="0" marL="0">
+                        <a:buNone/>
+                      </a:pPr>
+                      <a:r>
+                        <a:rPr lang="en-US" sz="1200" dirty="0">
+                          <a:solidFill>
+                            <a:srgbClr val="6B4B00"/>
+                          </a:solidFill>
+                          <a:latin typeface="Calibri" pitchFamily="34" charset="0"/>
+                          <a:ea typeface="Calibri" pitchFamily="34" charset="-122"/>
+                          <a:cs typeface="Calibri" pitchFamily="34" charset="-120"/>
+                        </a:rPr>
+                        <a:t>⚠ スムージー(DAY4〜6)はDAY4・5がシフト前、DAY6のみシフト後。結論は参考値として扱う</a:t>
+                      </a:r>
+                      <a:endParaRPr lang="en-US" sz="1200" dirty="0">
+                        <a:latin typeface="Calibri" charset="0"/>
+                        <a:ea typeface="Calibri" charset="0"/>
+                        <a:cs typeface="Calibri" charset="0"/>
+                      </a:endParaRPr>
+                    </a:p>
+                  </a:txBody>
+                  <a:tcPr marL="91440" marR="91440" marT="45720" marB="45720" anchor="ctr">
+                    <a:lnL w="9525" cap="flat" cmpd="sng" algn="ctr">
+                      <a:solidFill>
+                        <a:srgbClr val="E3E1DB"/>
+                      </a:solidFill>
+                      <a:prstDash val="solid"/>
+                      <a:round/>
+                      <a:headEnd type="none" w="med" len="med"/>
+                      <a:tailEnd type="none" w="med" len="med"/>
+                    </a:lnL>
+                    <a:lnR w="9525" cap="flat" cmpd="sng" algn="ctr">
+                      <a:solidFill>
+                        <a:srgbClr val="E3E1DB"/>
+                      </a:solidFill>
+                      <a:prstDash val="solid"/>
+                      <a:round/>
+                      <a:headEnd type="none" w="med" len="med"/>
+                      <a:tailEnd type="none" w="med" len="med"/>
+                    </a:lnR>
+                    <a:lnT w="9525" cap="flat" cmpd="sng" algn="ctr">
+                      <a:solidFill>
+                        <a:srgbClr val="E3E1DB"/>
+                      </a:solidFill>
+                      <a:prstDash val="solid"/>
+                      <a:round/>
+                      <a:headEnd type="none" w="med" len="med"/>
+                      <a:tailEnd type="none" w="med" len="med"/>
+                    </a:lnT>
+                    <a:lnB w="9525" cap="flat" cmpd="sng" algn="ctr">
+                      <a:solidFill>
+                        <a:srgbClr val="E3E1DB"/>
+                      </a:solidFill>
+                      <a:prstDash val="solid"/>
+                      <a:round/>
+                      <a:headEnd type="none" w="med" len="med"/>
+                      <a:tailEnd type="none" w="med" len="med"/>
+                    </a:lnB>
+                    <a:solidFill>
+                      <a:srgbClr val="FFFFFF"/>
+                    </a:solidFill>
+                  </a:tcPr>
+                </a:tc>
+              </a:tr>
+              <a:tr h="502920">
+                <a:tc>
+                  <a:txBody>
+                    <a:bodyPr/>
+                    <a:lstStyle/>
+                    <a:p>
+                      <a:pPr indent="0" marL="0">
+                        <a:buNone/>
+                      </a:pPr>
+                      <a:r>
+                        <a:rPr lang="en-US" sz="1200" b="1" dirty="0">
+                          <a:solidFill>
+                            <a:srgbClr val="21295C"/>
+                          </a:solidFill>
+                          <a:latin typeface="Calibri" pitchFamily="34" charset="0"/>
+                          <a:ea typeface="Calibri" pitchFamily="34" charset="-122"/>
+                          <a:cs typeface="Calibri" pitchFamily="34" charset="-120"/>
+                        </a:rPr>
+                        <a:t>実験2（おにぎり+スムージー vs 糖質減）</a:t>
+                      </a:r>
+                      <a:endParaRPr lang="en-US" sz="1200" dirty="0">
+                        <a:latin typeface="Calibri" charset="0"/>
+                        <a:ea typeface="Calibri" charset="0"/>
+                        <a:cs typeface="Calibri" charset="0"/>
+                      </a:endParaRPr>
+                    </a:p>
+                  </a:txBody>
+                  <a:tcPr marL="91440" marR="91440" marT="45720" marB="45720" anchor="ctr">
+                    <a:lnL w="9525" cap="flat" cmpd="sng" algn="ctr">
+                      <a:solidFill>
+                        <a:srgbClr val="E3E1DB"/>
+                      </a:solidFill>
+                      <a:prstDash val="solid"/>
+                      <a:round/>
+                      <a:headEnd type="none" w="med" len="med"/>
+                      <a:tailEnd type="none" w="med" len="med"/>
+                    </a:lnL>
+                    <a:lnR w="9525" cap="flat" cmpd="sng" algn="ctr">
+                      <a:solidFill>
+                        <a:srgbClr val="E3E1DB"/>
+                      </a:solidFill>
+                      <a:prstDash val="solid"/>
+                      <a:round/>
+                      <a:headEnd type="none" w="med" len="med"/>
+                      <a:tailEnd type="none" w="med" len="med"/>
+                    </a:lnR>
+                    <a:lnT w="9525" cap="flat" cmpd="sng" algn="ctr">
+                      <a:solidFill>
+                        <a:srgbClr val="E3E1DB"/>
+                      </a:solidFill>
+                      <a:prstDash val="solid"/>
+                      <a:round/>
+                      <a:headEnd type="none" w="med" len="med"/>
+                      <a:tailEnd type="none" w="med" len="med"/>
+                    </a:lnT>
+                    <a:lnB w="9525" cap="flat" cmpd="sng" algn="ctr">
+                      <a:solidFill>
+                        <a:srgbClr val="E3E1DB"/>
+                      </a:solidFill>
+                      <a:prstDash val="solid"/>
+                      <a:round/>
+                      <a:headEnd type="none" w="med" len="med"/>
+                      <a:tailEnd type="none" w="med" len="med"/>
+                    </a:lnB>
+                    <a:solidFill>
+                      <a:srgbClr val="F4F7F9"/>
+                    </a:solidFill>
+                  </a:tcPr>
+                </a:tc>
+                <a:tc>
+                  <a:txBody>
+                    <a:bodyPr/>
+                    <a:lstStyle/>
+                    <a:p>
+                      <a:pPr indent="0" marL="0">
+                        <a:buNone/>
+                      </a:pPr>
+                      <a:r>
+                        <a:rPr lang="en-US" sz="1200" dirty="0">
+                          <a:solidFill>
+                            <a:srgbClr val="0F5C3D"/>
+                          </a:solidFill>
+                          <a:latin typeface="Calibri" pitchFamily="34" charset="0"/>
+                          <a:ea typeface="Calibri" pitchFamily="34" charset="-122"/>
+                          <a:cs typeface="Calibri" pitchFamily="34" charset="-120"/>
+                        </a:rPr>
+                        <a:t>✓ 両条件(DAY8〜13)とも完全にシフト後で条件が揃っており、結論を維持できる</a:t>
+                      </a:r>
+                      <a:endParaRPr lang="en-US" sz="1200" dirty="0">
+                        <a:latin typeface="Calibri" charset="0"/>
+                        <a:ea typeface="Calibri" charset="0"/>
+                        <a:cs typeface="Calibri" charset="0"/>
+                      </a:endParaRPr>
+                    </a:p>
+                  </a:txBody>
+                  <a:tcPr marL="91440" marR="91440" marT="45720" marB="45720" anchor="ctr">
+                    <a:lnL w="9525" cap="flat" cmpd="sng" algn="ctr">
+                      <a:solidFill>
+                        <a:srgbClr val="E3E1DB"/>
+                      </a:solidFill>
+                      <a:prstDash val="solid"/>
+                      <a:round/>
+                      <a:headEnd type="none" w="med" len="med"/>
+                      <a:tailEnd type="none" w="med" len="med"/>
+                    </a:lnL>
+                    <a:lnR w="9525" cap="flat" cmpd="sng" algn="ctr">
+                      <a:solidFill>
+                        <a:srgbClr val="E3E1DB"/>
+                      </a:solidFill>
+                      <a:prstDash val="solid"/>
+                      <a:round/>
+                      <a:headEnd type="none" w="med" len="med"/>
+                      <a:tailEnd type="none" w="med" len="med"/>
+                    </a:lnR>
+                    <a:lnT w="9525" cap="flat" cmpd="sng" algn="ctr">
+                      <a:solidFill>
+                        <a:srgbClr val="E3E1DB"/>
+                      </a:solidFill>
+                      <a:prstDash val="solid"/>
+                      <a:round/>
+                      <a:headEnd type="none" w="med" len="med"/>
+                      <a:tailEnd type="none" w="med" len="med"/>
+                    </a:lnT>
+                    <a:lnB w="9525" cap="flat" cmpd="sng" algn="ctr">
+                      <a:solidFill>
+                        <a:srgbClr val="E3E1DB"/>
+                      </a:solidFill>
+                      <a:prstDash val="solid"/>
+                      <a:round/>
+                      <a:headEnd type="none" w="med" len="med"/>
+                      <a:tailEnd type="none" w="med" len="med"/>
+                    </a:lnB>
+                    <a:solidFill>
+                      <a:srgbClr val="F4F7F9"/>
+                    </a:solidFill>
+                  </a:tcPr>
+                </a:tc>
+              </a:tr>
+            </a:tbl>
+          </a:graphicData>
+        </a:graphic>
+      </p:graphicFrame>
+      <p:sp>
+        <p:nvSpPr>
+          <p:cNvPr id="7" name="Shape 3"/>
           <p:cNvSpPr/>
           <p:nvPr/>
         </p:nvSpPr>
         <p:spPr>
           <a:xfrm>
-            <a:off x="548640" y="1600200"/>
-            <a:ext cx="11091672" cy="1417320"/>
+            <a:off x="548640" y="5532120"/>
+            <a:ext cx="11091672" cy="960120"/>
           </a:xfrm>
           <a:prstGeom prst="roundRect">
             <a:avLst>
-              <a:gd name="adj" fmla="val 7742"/>
+              <a:gd name="adj" fmla="val 9524"/>
             </a:avLst>
           </a:prstGeom>
           <a:solidFill>
@@ -16634,14 +17663,14 @@
       </p:sp>
       <p:sp>
         <p:nvSpPr>
-          <p:cNvPr id="5" name="Text 3"/>
+          <p:cNvPr id="8" name="Text 4"/>
           <p:cNvSpPr txBox="1"/>
           <p:nvPr/>
         </p:nvSpPr>
         <p:spPr>
           <a:xfrm>
-            <a:off x="822960" y="1737360"/>
-            <a:ext cx="10543032" cy="274320"/>
+            <a:off x="777240" y="5650992"/>
+            <a:ext cx="10634472" cy="731520"/>
           </a:xfrm>
           <a:prstGeom prst="rect">
             <a:avLst/>
@@ -16657,7 +17686,7 @@
               <a:buNone/>
             </a:pPr>
             <a:r>
-              <a:rPr lang="en-US" sz="1300" b="1" dirty="0">
+              <a:rPr lang="en-US" sz="1100" b="1" dirty="0">
                 <a:solidFill>
                   <a:srgbClr val="6B4B00"/>
                 </a:solidFill>
@@ -16665,505 +17694,9 @@
                 <a:ea typeface="Calibri" pitchFamily="34" charset="-122"/>
                 <a:cs typeface="Calibri" pitchFamily="34" charset="-120"/>
               </a:rPr>
-              <a:t>⚠ 重要な交絡：練習時間が条件ブロックごとに大きく異なる</a:t>
-            </a:r>
-            <a:endParaRPr lang="en-US" sz="1300" dirty="0"/>
-          </a:p>
-        </p:txBody>
-      </p:sp>
-      <p:sp>
-        <p:nvSpPr>
-          <p:cNvPr id="6" name="Text 4"/>
-          <p:cNvSpPr txBox="1"/>
-          <p:nvPr/>
-        </p:nvSpPr>
-        <p:spPr>
-          <a:xfrm>
-            <a:off x="822960" y="2048256"/>
-            <a:ext cx="10543032" cy="914400"/>
-          </a:xfrm>
-          <a:prstGeom prst="rect">
-            <a:avLst/>
-          </a:prstGeom>
-          <a:noFill/>
-          <a:ln/>
-        </p:spPr>
-        <p:txBody>
-          <a:bodyPr wrap="square" lIns="0" tIns="0" rIns="0" bIns="0" rtlCol="0" anchor="ctr"/>
-          <a:lstStyle/>
-          <a:p>
-            <a:pPr indent="0" marL="0">
-              <a:buNone/>
-            </a:pPr>
-            <a:r>
-              <a:rPr lang="en-US" sz="1150" dirty="0">
-                <a:solidFill>
-                  <a:srgbClr val="6B4B00"/>
-                </a:solidFill>
-                <a:latin typeface="Calibri" pitchFamily="34" charset="0"/>
-                <a:ea typeface="Calibri" pitchFamily="34" charset="-122"/>
-                <a:cs typeface="Calibri" pitchFamily="34" charset="-120"/>
-              </a:rPr>
-              <a:t>実験1・固形の3日間は平均140分と突出して長く、実験1・スムージーの3日間は毎日60分で最短。RPE・爆発力・持久力・運動後疲労は運動量そのものにも左右されるため、この差を切り分けられていない点は最大の限界。</a:t>
-            </a:r>
-            <a:endParaRPr lang="en-US" sz="1150" dirty="0"/>
-          </a:p>
-        </p:txBody>
-      </p:sp>
-      <p:sp>
-        <p:nvSpPr>
-          <p:cNvPr id="7" name="Shape 5"/>
-          <p:cNvSpPr/>
-          <p:nvPr/>
-        </p:nvSpPr>
-        <p:spPr>
-          <a:xfrm>
-            <a:off x="548640" y="3200400"/>
-            <a:ext cx="5362956" cy="1828800"/>
-          </a:xfrm>
-          <a:prstGeom prst="roundRect">
-            <a:avLst>
-              <a:gd name="adj" fmla="val 5000"/>
-            </a:avLst>
-          </a:prstGeom>
-          <a:solidFill>
-            <a:srgbClr val="F4F7F9"/>
-          </a:solidFill>
-          <a:ln/>
-        </p:spPr>
-      </p:sp>
-      <p:sp>
-        <p:nvSpPr>
-          <p:cNvPr id="8" name="Shape 6"/>
-          <p:cNvSpPr/>
-          <p:nvPr/>
-        </p:nvSpPr>
-        <p:spPr>
-          <a:xfrm>
-            <a:off x="822960" y="3337560"/>
-            <a:ext cx="146304" cy="347472"/>
-          </a:xfrm>
-          <a:prstGeom prst="rect">
-            <a:avLst/>
-          </a:prstGeom>
-          <a:solidFill>
-            <a:srgbClr val="1BAF7A"/>
-          </a:solidFill>
-          <a:ln/>
-        </p:spPr>
-      </p:sp>
-      <p:sp>
-        <p:nvSpPr>
-          <p:cNvPr id="9" name="Text 7"/>
-          <p:cNvSpPr txBox="1"/>
-          <p:nvPr/>
-        </p:nvSpPr>
-        <p:spPr>
-          <a:xfrm>
-            <a:off x="1078992" y="3300984"/>
-            <a:ext cx="4539996" cy="420624"/>
-          </a:xfrm>
-          <a:prstGeom prst="rect">
-            <a:avLst/>
-          </a:prstGeom>
-          <a:noFill/>
-          <a:ln/>
-        </p:spPr>
-        <p:txBody>
-          <a:bodyPr wrap="square" lIns="0" tIns="0" rIns="0" bIns="0" rtlCol="0" anchor="ctr"/>
-          <a:lstStyle/>
-          <a:p>
-            <a:pPr indent="0" marL="0">
-              <a:buNone/>
-            </a:pPr>
-            <a:r>
-              <a:rPr lang="en-US" sz="1400" b="1" dirty="0">
-                <a:solidFill>
-                  <a:srgbClr val="21295C"/>
-                </a:solidFill>
-                <a:latin typeface="Calibri" pitchFamily="34" charset="0"/>
-                <a:ea typeface="Calibri" pitchFamily="34" charset="-122"/>
-                <a:cs typeface="Calibri" pitchFamily="34" charset="-120"/>
-              </a:rPr>
-              <a:t>おにぎり＋スムージー（糖質ノーマル）</a:t>
-            </a:r>
-            <a:endParaRPr lang="en-US" sz="1400" dirty="0"/>
-          </a:p>
-        </p:txBody>
-      </p:sp>
-      <p:sp>
-        <p:nvSpPr>
-          <p:cNvPr id="10" name="Text 8"/>
-          <p:cNvSpPr txBox="1"/>
-          <p:nvPr/>
-        </p:nvSpPr>
-        <p:spPr>
-          <a:xfrm>
-            <a:off x="822960" y="3794760"/>
-            <a:ext cx="4814316" cy="347472"/>
-          </a:xfrm>
-          <a:prstGeom prst="rect">
-            <a:avLst/>
-          </a:prstGeom>
-          <a:noFill/>
-          <a:ln/>
-        </p:spPr>
-        <p:txBody>
-          <a:bodyPr wrap="square" lIns="0" tIns="0" rIns="0" bIns="0" rtlCol="0" anchor="ctr"/>
-          <a:lstStyle/>
-          <a:p>
-            <a:pPr indent="0" marL="0">
-              <a:buNone/>
-            </a:pPr>
-            <a:r>
-              <a:rPr lang="en-US" sz="1100" dirty="0">
-                <a:solidFill>
-                  <a:srgbClr val="1A1A1A"/>
-                </a:solidFill>
-                <a:latin typeface="Calibri" pitchFamily="34" charset="0"/>
-                <a:ea typeface="Calibri" pitchFamily="34" charset="-122"/>
-                <a:cs typeface="Calibri" pitchFamily="34" charset="-120"/>
-              </a:rPr>
-              <a:t>•  血糖の乱高下（CV）が4条件中最小、練習中の燃料供給も十分（220）</a:t>
+              <a:t>DAY5(8/29)14:50頃、血糖が150→270台へ急上昇し以後戻らず（夜間平均93〜107→130〜177mg/dL）。原因不明だが低血糖は14日間通じて一度も検出されず。選手・スタッフへの聞き取りが最優先の次の一手。</a:t>
             </a:r>
             <a:endParaRPr lang="en-US" sz="1100" dirty="0"/>
-          </a:p>
-        </p:txBody>
-      </p:sp>
-      <p:sp>
-        <p:nvSpPr>
-          <p:cNvPr id="11" name="Text 9"/>
-          <p:cNvSpPr txBox="1"/>
-          <p:nvPr/>
-        </p:nvSpPr>
-        <p:spPr>
-          <a:xfrm>
-            <a:off x="822960" y="4178808"/>
-            <a:ext cx="4814316" cy="347472"/>
-          </a:xfrm>
-          <a:prstGeom prst="rect">
-            <a:avLst/>
-          </a:prstGeom>
-          <a:noFill/>
-          <a:ln/>
-        </p:spPr>
-        <p:txBody>
-          <a:bodyPr wrap="square" lIns="0" tIns="0" rIns="0" bIns="0" rtlCol="0" anchor="ctr"/>
-          <a:lstStyle/>
-          <a:p>
-            <a:pPr indent="0" marL="0">
-              <a:buNone/>
-            </a:pPr>
-            <a:r>
-              <a:rPr lang="en-US" sz="1100" dirty="0">
-                <a:solidFill>
-                  <a:srgbClr val="1A1A1A"/>
-                </a:solidFill>
-                <a:latin typeface="Calibri" pitchFamily="34" charset="0"/>
-                <a:ea typeface="Calibri" pitchFamily="34" charset="-122"/>
-                <a:cs typeface="Calibri" pitchFamily="34" charset="-120"/>
-              </a:rPr>
-              <a:t>•  持久力の自己評価が4条件中最高（3.83）</a:t>
-            </a:r>
-            <a:endParaRPr lang="en-US" sz="1100" dirty="0"/>
-          </a:p>
-        </p:txBody>
-      </p:sp>
-      <p:sp>
-        <p:nvSpPr>
-          <p:cNvPr id="12" name="Text 10"/>
-          <p:cNvSpPr txBox="1"/>
-          <p:nvPr/>
-        </p:nvSpPr>
-        <p:spPr>
-          <a:xfrm>
-            <a:off x="822960" y="4562856"/>
-            <a:ext cx="4814316" cy="347472"/>
-          </a:xfrm>
-          <a:prstGeom prst="rect">
-            <a:avLst/>
-          </a:prstGeom>
-          <a:noFill/>
-          <a:ln/>
-        </p:spPr>
-        <p:txBody>
-          <a:bodyPr wrap="square" lIns="0" tIns="0" rIns="0" bIns="0" rtlCol="0" anchor="ctr"/>
-          <a:lstStyle/>
-          <a:p>
-            <a:pPr indent="0" marL="0">
-              <a:buNone/>
-            </a:pPr>
-            <a:r>
-              <a:rPr lang="en-US" sz="1100" dirty="0">
-                <a:solidFill>
-                  <a:srgbClr val="1A1A1A"/>
-                </a:solidFill>
-                <a:latin typeface="Calibri" pitchFamily="34" charset="0"/>
-                <a:ea typeface="Calibri" pitchFamily="34" charset="-122"/>
-                <a:cs typeface="Calibri" pitchFamily="34" charset="-120"/>
-              </a:rPr>
-              <a:t>•  消化器症状も軽微</a:t>
-            </a:r>
-            <a:endParaRPr lang="en-US" sz="1100" dirty="0"/>
-          </a:p>
-        </p:txBody>
-      </p:sp>
-      <p:sp>
-        <p:nvSpPr>
-          <p:cNvPr id="13" name="Shape 11"/>
-          <p:cNvSpPr/>
-          <p:nvPr/>
-        </p:nvSpPr>
-        <p:spPr>
-          <a:xfrm>
-            <a:off x="6277356" y="3200400"/>
-            <a:ext cx="5362956" cy="1828800"/>
-          </a:xfrm>
-          <a:prstGeom prst="roundRect">
-            <a:avLst>
-              <a:gd name="adj" fmla="val 5000"/>
-            </a:avLst>
-          </a:prstGeom>
-          <a:solidFill>
-            <a:srgbClr val="F4F7F9"/>
-          </a:solidFill>
-          <a:ln/>
-        </p:spPr>
-      </p:sp>
-      <p:sp>
-        <p:nvSpPr>
-          <p:cNvPr id="14" name="Shape 12"/>
-          <p:cNvSpPr/>
-          <p:nvPr/>
-        </p:nvSpPr>
-        <p:spPr>
-          <a:xfrm>
-            <a:off x="6551676" y="3337560"/>
-            <a:ext cx="146304" cy="347472"/>
-          </a:xfrm>
-          <a:prstGeom prst="rect">
-            <a:avLst/>
-          </a:prstGeom>
-          <a:solidFill>
-            <a:srgbClr val="EDA100"/>
-          </a:solidFill>
-          <a:ln/>
-        </p:spPr>
-      </p:sp>
-      <p:sp>
-        <p:nvSpPr>
-          <p:cNvPr id="15" name="Text 13"/>
-          <p:cNvSpPr txBox="1"/>
-          <p:nvPr/>
-        </p:nvSpPr>
-        <p:spPr>
-          <a:xfrm>
-            <a:off x="6807708" y="3300984"/>
-            <a:ext cx="4539996" cy="420624"/>
-          </a:xfrm>
-          <a:prstGeom prst="rect">
-            <a:avLst/>
-          </a:prstGeom>
-          <a:noFill/>
-          <a:ln/>
-        </p:spPr>
-        <p:txBody>
-          <a:bodyPr wrap="square" lIns="0" tIns="0" rIns="0" bIns="0" rtlCol="0" anchor="ctr"/>
-          <a:lstStyle/>
-          <a:p>
-            <a:pPr indent="0" marL="0">
-              <a:buNone/>
-            </a:pPr>
-            <a:r>
-              <a:rPr lang="en-US" sz="1400" b="1" dirty="0">
-                <a:solidFill>
-                  <a:srgbClr val="21295C"/>
-                </a:solidFill>
-                <a:latin typeface="Calibri" pitchFamily="34" charset="0"/>
-                <a:ea typeface="Calibri" pitchFamily="34" charset="-122"/>
-                <a:cs typeface="Calibri" pitchFamily="34" charset="-120"/>
-              </a:rPr>
-              <a:t>おにぎり＋糖質減</a:t>
-            </a:r>
-            <a:endParaRPr lang="en-US" sz="1400" dirty="0"/>
-          </a:p>
-        </p:txBody>
-      </p:sp>
-      <p:sp>
-        <p:nvSpPr>
-          <p:cNvPr id="16" name="Text 14"/>
-          <p:cNvSpPr txBox="1"/>
-          <p:nvPr/>
-        </p:nvSpPr>
-        <p:spPr>
-          <a:xfrm>
-            <a:off x="6551676" y="3794760"/>
-            <a:ext cx="4814316" cy="347472"/>
-          </a:xfrm>
-          <a:prstGeom prst="rect">
-            <a:avLst/>
-          </a:prstGeom>
-          <a:noFill/>
-          <a:ln/>
-        </p:spPr>
-        <p:txBody>
-          <a:bodyPr wrap="square" lIns="0" tIns="0" rIns="0" bIns="0" rtlCol="0" anchor="ctr"/>
-          <a:lstStyle/>
-          <a:p>
-            <a:pPr indent="0" marL="0">
-              <a:buNone/>
-            </a:pPr>
-            <a:r>
-              <a:rPr lang="en-US" sz="1100" dirty="0">
-                <a:solidFill>
-                  <a:srgbClr val="1A1A1A"/>
-                </a:solidFill>
-                <a:latin typeface="Calibri" pitchFamily="34" charset="0"/>
-                <a:ea typeface="Calibri" pitchFamily="34" charset="-122"/>
-                <a:cs typeface="Calibri" pitchFamily="34" charset="-120"/>
-              </a:rPr>
-              <a:t>•  波形が最もなだらか、練習中の燃料供給はむしろ4条件中最高（229）</a:t>
-            </a:r>
-            <a:endParaRPr lang="en-US" sz="1100" dirty="0"/>
-          </a:p>
-        </p:txBody>
-      </p:sp>
-      <p:sp>
-        <p:nvSpPr>
-          <p:cNvPr id="17" name="Text 15"/>
-          <p:cNvSpPr txBox="1"/>
-          <p:nvPr/>
-        </p:nvSpPr>
-        <p:spPr>
-          <a:xfrm>
-            <a:off x="6551676" y="4178808"/>
-            <a:ext cx="4814316" cy="347472"/>
-          </a:xfrm>
-          <a:prstGeom prst="rect">
-            <a:avLst/>
-          </a:prstGeom>
-          <a:noFill/>
-          <a:ln/>
-        </p:spPr>
-        <p:txBody>
-          <a:bodyPr wrap="square" lIns="0" tIns="0" rIns="0" bIns="0" rtlCol="0" anchor="ctr"/>
-          <a:lstStyle/>
-          <a:p>
-            <a:pPr indent="0" marL="0">
-              <a:buNone/>
-            </a:pPr>
-            <a:r>
-              <a:rPr lang="en-US" sz="1100" dirty="0">
-                <a:solidFill>
-                  <a:srgbClr val="1A1A1A"/>
-                </a:solidFill>
-                <a:latin typeface="Calibri" pitchFamily="34" charset="0"/>
-                <a:ea typeface="Calibri" pitchFamily="34" charset="-122"/>
-                <a:cs typeface="Calibri" pitchFamily="34" charset="-120"/>
-              </a:rPr>
-              <a:t>•  起床時コンディション・睡眠の質が4条件中最高</a:t>
-            </a:r>
-            <a:endParaRPr lang="en-US" sz="1100" dirty="0"/>
-          </a:p>
-        </p:txBody>
-      </p:sp>
-      <p:sp>
-        <p:nvSpPr>
-          <p:cNvPr id="18" name="Text 16"/>
-          <p:cNvSpPr txBox="1"/>
-          <p:nvPr/>
-        </p:nvSpPr>
-        <p:spPr>
-          <a:xfrm>
-            <a:off x="6551676" y="4562856"/>
-            <a:ext cx="4814316" cy="347472"/>
-          </a:xfrm>
-          <a:prstGeom prst="rect">
-            <a:avLst/>
-          </a:prstGeom>
-          <a:noFill/>
-          <a:ln/>
-        </p:spPr>
-        <p:txBody>
-          <a:bodyPr wrap="square" lIns="0" tIns="0" rIns="0" bIns="0" rtlCol="0" anchor="ctr"/>
-          <a:lstStyle/>
-          <a:p>
-            <a:pPr indent="0" marL="0">
-              <a:buNone/>
-            </a:pPr>
-            <a:r>
-              <a:rPr lang="en-US" sz="1100" dirty="0">
-                <a:solidFill>
-                  <a:srgbClr val="1A1A1A"/>
-                </a:solidFill>
-                <a:latin typeface="Calibri" pitchFamily="34" charset="0"/>
-                <a:ea typeface="Calibri" pitchFamily="34" charset="-122"/>
-                <a:cs typeface="Calibri" pitchFamily="34" charset="-120"/>
-              </a:rPr>
-              <a:t>•  一方で持久力・爆発力の自己評価は4条件中最低（要検証の矛盾）</a:t>
-            </a:r>
-            <a:endParaRPr lang="en-US" sz="1100" dirty="0"/>
-          </a:p>
-        </p:txBody>
-      </p:sp>
-      <p:sp>
-        <p:nvSpPr>
-          <p:cNvPr id="19" name="Shape 17"/>
-          <p:cNvSpPr/>
-          <p:nvPr/>
-        </p:nvSpPr>
-        <p:spPr>
-          <a:xfrm>
-            <a:off x="548640" y="5212080"/>
-            <a:ext cx="11091672" cy="1188720"/>
-          </a:xfrm>
-          <a:prstGeom prst="roundRect">
-            <a:avLst>
-              <a:gd name="adj" fmla="val 7692"/>
-            </a:avLst>
-          </a:prstGeom>
-          <a:solidFill>
-            <a:srgbClr val="EAF7F0"/>
-          </a:solidFill>
-          <a:ln/>
-        </p:spPr>
-      </p:sp>
-      <p:sp>
-        <p:nvSpPr>
-          <p:cNvPr id="20" name="Text 18"/>
-          <p:cNvSpPr txBox="1"/>
-          <p:nvPr/>
-        </p:nvSpPr>
-        <p:spPr>
-          <a:xfrm>
-            <a:off x="822960" y="5394960"/>
-            <a:ext cx="10543032" cy="868680"/>
-          </a:xfrm>
-          <a:prstGeom prst="rect">
-            <a:avLst/>
-          </a:prstGeom>
-          <a:noFill/>
-          <a:ln/>
-        </p:spPr>
-        <p:txBody>
-          <a:bodyPr wrap="square" lIns="0" tIns="0" rIns="0" bIns="0" rtlCol="0" anchor="ctr"/>
-          <a:lstStyle/>
-          <a:p>
-            <a:pPr indent="0" marL="0">
-              <a:buNone/>
-            </a:pPr>
-            <a:r>
-              <a:rPr lang="en-US" sz="1250" b="1" dirty="0">
-                <a:solidFill>
-                  <a:srgbClr val="0F5C3D"/>
-                </a:solidFill>
-                <a:latin typeface="Calibri" pitchFamily="34" charset="0"/>
-                <a:ea typeface="Calibri" pitchFamily="34" charset="-122"/>
-                <a:cs typeface="Calibri" pitchFamily="34" charset="-120"/>
-              </a:rPr>
-              <a:t>✓ 総合評価：現時点のデータでは「おにぎり＋スムージー（糖質ノーマル、同時摂取）」が最もバランスの良い候補。「おにぎり＋糖質減」は血糖面ではむしろ優れており、体感との矛盾を解消できれば第一候補に上がる可能性もある。</a:t>
-            </a:r>
-            <a:endParaRPr lang="en-US" sz="1250" dirty="0"/>
           </a:p>
         </p:txBody>
       </p:sp>
@@ -17178,6 +17711,678 @@
 <file path=ppt/slides/slide23.xml><?xml version="1.0" encoding="utf-8"?>
 <p:sld xmlns:a="http://schemas.openxmlformats.org/drawingml/2006/main" xmlns:r="http://schemas.openxmlformats.org/officeDocument/2006/relationships" xmlns:p="http://schemas.openxmlformats.org/presentationml/2006/main">
   <p:cSld name="Slide 23">
+    <p:bg>
+      <p:bgPr>
+        <a:solidFill>
+          <a:srgbClr val="FFFFFF"/>
+        </a:solidFill>
+      </p:bgPr>
+    </p:bg>
+    <p:spTree>
+      <p:nvGrpSpPr>
+        <p:cNvPr id="1" name=""/>
+        <p:cNvGrpSpPr/>
+        <p:nvPr/>
+      </p:nvGrpSpPr>
+      <p:grpSpPr>
+        <a:xfrm>
+          <a:off x="0" y="0"/>
+          <a:ext cx="0" cy="0"/>
+          <a:chOff x="0" y="0"/>
+          <a:chExt cx="0" cy="0"/>
+        </a:xfrm>
+      </p:grpSpPr>
+      <p:sp>
+        <p:nvSpPr>
+          <p:cNvPr id="2" name="Text 0"/>
+          <p:cNvSpPr txBox="1"/>
+          <p:nvPr/>
+        </p:nvSpPr>
+        <p:spPr>
+          <a:xfrm>
+            <a:off x="548640" y="457200"/>
+            <a:ext cx="11091672" cy="365760"/>
+          </a:xfrm>
+          <a:prstGeom prst="rect">
+            <a:avLst/>
+          </a:prstGeom>
+          <a:noFill/>
+          <a:ln/>
+        </p:spPr>
+        <p:txBody>
+          <a:bodyPr wrap="square" rtlCol="0" anchor="ctr"/>
+          <a:lstStyle/>
+          <a:p>
+            <a:pPr indent="0" marL="0">
+              <a:buNone/>
+            </a:pPr>
+            <a:r>
+              <a:rPr lang="en-US" sz="1300" b="1" spc="100" kern="0" dirty="0">
+                <a:solidFill>
+                  <a:srgbClr val="1C7293"/>
+                </a:solidFill>
+                <a:latin typeface="Calibri" pitchFamily="34" charset="0"/>
+                <a:ea typeface="Calibri" pitchFamily="34" charset="-122"/>
+                <a:cs typeface="Calibri" pitchFamily="34" charset="-120"/>
+              </a:rPr>
+              <a:t>GENERAL DISCUSSION</a:t>
+            </a:r>
+            <a:endParaRPr lang="en-US" sz="1300" dirty="0"/>
+          </a:p>
+        </p:txBody>
+      </p:sp>
+      <p:sp>
+        <p:nvSpPr>
+          <p:cNvPr id="3" name="Text 1"/>
+          <p:cNvSpPr txBox="1"/>
+          <p:nvPr/>
+        </p:nvSpPr>
+        <p:spPr>
+          <a:xfrm>
+            <a:off x="548640" y="786384"/>
+            <a:ext cx="11091672" cy="640080"/>
+          </a:xfrm>
+          <a:prstGeom prst="rect">
+            <a:avLst/>
+          </a:prstGeom>
+          <a:noFill/>
+          <a:ln/>
+        </p:spPr>
+        <p:txBody>
+          <a:bodyPr wrap="square" rtlCol="0" anchor="ctr"/>
+          <a:lstStyle/>
+          <a:p>
+            <a:pPr indent="0" marL="0">
+              <a:buNone/>
+            </a:pPr>
+            <a:r>
+              <a:rPr lang="en-US" sz="2700" b="1" dirty="0">
+                <a:solidFill>
+                  <a:srgbClr val="21295C"/>
+                </a:solidFill>
+                <a:latin typeface="Cambria" pitchFamily="34" charset="0"/>
+                <a:ea typeface="Cambria" pitchFamily="34" charset="-122"/>
+                <a:cs typeface="Cambria" pitchFamily="34" charset="-120"/>
+              </a:rPr>
+              <a:t>総合考察まとめ</a:t>
+            </a:r>
+            <a:endParaRPr lang="en-US" sz="2700" dirty="0"/>
+          </a:p>
+        </p:txBody>
+      </p:sp>
+      <p:sp>
+        <p:nvSpPr>
+          <p:cNvPr id="4" name="Shape 2"/>
+          <p:cNvSpPr/>
+          <p:nvPr/>
+        </p:nvSpPr>
+        <p:spPr>
+          <a:xfrm>
+            <a:off x="548640" y="1600200"/>
+            <a:ext cx="11091672" cy="1417320"/>
+          </a:xfrm>
+          <a:prstGeom prst="roundRect">
+            <a:avLst>
+              <a:gd name="adj" fmla="val 7742"/>
+            </a:avLst>
+          </a:prstGeom>
+          <a:solidFill>
+            <a:srgbClr val="FDF3E2"/>
+          </a:solidFill>
+          <a:ln w="12700">
+            <a:solidFill>
+              <a:srgbClr val="EDA100"/>
+            </a:solidFill>
+            <a:prstDash val="solid"/>
+          </a:ln>
+        </p:spPr>
+      </p:sp>
+      <p:sp>
+        <p:nvSpPr>
+          <p:cNvPr id="5" name="Text 3"/>
+          <p:cNvSpPr txBox="1"/>
+          <p:nvPr/>
+        </p:nvSpPr>
+        <p:spPr>
+          <a:xfrm>
+            <a:off x="822960" y="1737360"/>
+            <a:ext cx="10543032" cy="274320"/>
+          </a:xfrm>
+          <a:prstGeom prst="rect">
+            <a:avLst/>
+          </a:prstGeom>
+          <a:noFill/>
+          <a:ln/>
+        </p:spPr>
+        <p:txBody>
+          <a:bodyPr wrap="square" lIns="0" tIns="0" rIns="0" bIns="0" rtlCol="0" anchor="ctr"/>
+          <a:lstStyle/>
+          <a:p>
+            <a:pPr indent="0" marL="0">
+              <a:buNone/>
+            </a:pPr>
+            <a:r>
+              <a:rPr lang="en-US" sz="1300" b="1" dirty="0">
+                <a:solidFill>
+                  <a:srgbClr val="6B4B00"/>
+                </a:solidFill>
+                <a:latin typeface="Calibri" pitchFamily="34" charset="0"/>
+                <a:ea typeface="Calibri" pitchFamily="34" charset="-122"/>
+                <a:cs typeface="Calibri" pitchFamily="34" charset="-120"/>
+              </a:rPr>
+              <a:t>⚠ 重要な交絡：練習時間が条件ブロックごとに大きく異なる</a:t>
+            </a:r>
+            <a:endParaRPr lang="en-US" sz="1300" dirty="0"/>
+          </a:p>
+        </p:txBody>
+      </p:sp>
+      <p:sp>
+        <p:nvSpPr>
+          <p:cNvPr id="6" name="Text 4"/>
+          <p:cNvSpPr txBox="1"/>
+          <p:nvPr/>
+        </p:nvSpPr>
+        <p:spPr>
+          <a:xfrm>
+            <a:off x="822960" y="2048256"/>
+            <a:ext cx="10543032" cy="914400"/>
+          </a:xfrm>
+          <a:prstGeom prst="rect">
+            <a:avLst/>
+          </a:prstGeom>
+          <a:noFill/>
+          <a:ln/>
+        </p:spPr>
+        <p:txBody>
+          <a:bodyPr wrap="square" lIns="0" tIns="0" rIns="0" bIns="0" rtlCol="0" anchor="ctr"/>
+          <a:lstStyle/>
+          <a:p>
+            <a:pPr indent="0" marL="0">
+              <a:buNone/>
+            </a:pPr>
+            <a:r>
+              <a:rPr lang="en-US" sz="1150" dirty="0">
+                <a:solidFill>
+                  <a:srgbClr val="6B4B00"/>
+                </a:solidFill>
+                <a:latin typeface="Calibri" pitchFamily="34" charset="0"/>
+                <a:ea typeface="Calibri" pitchFamily="34" charset="-122"/>
+                <a:cs typeface="Calibri" pitchFamily="34" charset="-120"/>
+              </a:rPr>
+              <a:t>実験1・固形の3日間は平均140分と突出して長く、実験1・スムージーの3日間は毎日60分で最短。RPE・爆発力・持久力・運動後疲労は運動量そのものにも左右されるため、この差を切り分けられていない点は最大の限界。</a:t>
+            </a:r>
+            <a:endParaRPr lang="en-US" sz="1150" dirty="0"/>
+          </a:p>
+        </p:txBody>
+      </p:sp>
+      <p:sp>
+        <p:nvSpPr>
+          <p:cNvPr id="7" name="Shape 5"/>
+          <p:cNvSpPr/>
+          <p:nvPr/>
+        </p:nvSpPr>
+        <p:spPr>
+          <a:xfrm>
+            <a:off x="548640" y="3200400"/>
+            <a:ext cx="5362956" cy="1828800"/>
+          </a:xfrm>
+          <a:prstGeom prst="roundRect">
+            <a:avLst>
+              <a:gd name="adj" fmla="val 5000"/>
+            </a:avLst>
+          </a:prstGeom>
+          <a:solidFill>
+            <a:srgbClr val="F4F7F9"/>
+          </a:solidFill>
+          <a:ln/>
+        </p:spPr>
+      </p:sp>
+      <p:sp>
+        <p:nvSpPr>
+          <p:cNvPr id="8" name="Shape 6"/>
+          <p:cNvSpPr/>
+          <p:nvPr/>
+        </p:nvSpPr>
+        <p:spPr>
+          <a:xfrm>
+            <a:off x="822960" y="3337560"/>
+            <a:ext cx="146304" cy="347472"/>
+          </a:xfrm>
+          <a:prstGeom prst="rect">
+            <a:avLst/>
+          </a:prstGeom>
+          <a:solidFill>
+            <a:srgbClr val="1BAF7A"/>
+          </a:solidFill>
+          <a:ln/>
+        </p:spPr>
+      </p:sp>
+      <p:sp>
+        <p:nvSpPr>
+          <p:cNvPr id="9" name="Text 7"/>
+          <p:cNvSpPr txBox="1"/>
+          <p:nvPr/>
+        </p:nvSpPr>
+        <p:spPr>
+          <a:xfrm>
+            <a:off x="1078992" y="3300984"/>
+            <a:ext cx="4539996" cy="420624"/>
+          </a:xfrm>
+          <a:prstGeom prst="rect">
+            <a:avLst/>
+          </a:prstGeom>
+          <a:noFill/>
+          <a:ln/>
+        </p:spPr>
+        <p:txBody>
+          <a:bodyPr wrap="square" lIns="0" tIns="0" rIns="0" bIns="0" rtlCol="0" anchor="ctr"/>
+          <a:lstStyle/>
+          <a:p>
+            <a:pPr indent="0" marL="0">
+              <a:buNone/>
+            </a:pPr>
+            <a:r>
+              <a:rPr lang="en-US" sz="1400" b="1" dirty="0">
+                <a:solidFill>
+                  <a:srgbClr val="21295C"/>
+                </a:solidFill>
+                <a:latin typeface="Calibri" pitchFamily="34" charset="0"/>
+                <a:ea typeface="Calibri" pitchFamily="34" charset="-122"/>
+                <a:cs typeface="Calibri" pitchFamily="34" charset="-120"/>
+              </a:rPr>
+              <a:t>おにぎり＋スムージー（糖質ノーマル）</a:t>
+            </a:r>
+            <a:endParaRPr lang="en-US" sz="1400" dirty="0"/>
+          </a:p>
+        </p:txBody>
+      </p:sp>
+      <p:sp>
+        <p:nvSpPr>
+          <p:cNvPr id="10" name="Text 8"/>
+          <p:cNvSpPr txBox="1"/>
+          <p:nvPr/>
+        </p:nvSpPr>
+        <p:spPr>
+          <a:xfrm>
+            <a:off x="822960" y="3794760"/>
+            <a:ext cx="4814316" cy="347472"/>
+          </a:xfrm>
+          <a:prstGeom prst="rect">
+            <a:avLst/>
+          </a:prstGeom>
+          <a:noFill/>
+          <a:ln/>
+        </p:spPr>
+        <p:txBody>
+          <a:bodyPr wrap="square" lIns="0" tIns="0" rIns="0" bIns="0" rtlCol="0" anchor="ctr"/>
+          <a:lstStyle/>
+          <a:p>
+            <a:pPr indent="0" marL="0">
+              <a:buNone/>
+            </a:pPr>
+            <a:r>
+              <a:rPr lang="en-US" sz="1100" dirty="0">
+                <a:solidFill>
+                  <a:srgbClr val="1A1A1A"/>
+                </a:solidFill>
+                <a:latin typeface="Calibri" pitchFamily="34" charset="0"/>
+                <a:ea typeface="Calibri" pitchFamily="34" charset="-122"/>
+                <a:cs typeface="Calibri" pitchFamily="34" charset="-120"/>
+              </a:rPr>
+              <a:t>•  血糖の乱高下（CV）が4条件中最小、練習中の燃料供給も十分（220）</a:t>
+            </a:r>
+            <a:endParaRPr lang="en-US" sz="1100" dirty="0"/>
+          </a:p>
+        </p:txBody>
+      </p:sp>
+      <p:sp>
+        <p:nvSpPr>
+          <p:cNvPr id="11" name="Text 9"/>
+          <p:cNvSpPr txBox="1"/>
+          <p:nvPr/>
+        </p:nvSpPr>
+        <p:spPr>
+          <a:xfrm>
+            <a:off x="822960" y="4178808"/>
+            <a:ext cx="4814316" cy="347472"/>
+          </a:xfrm>
+          <a:prstGeom prst="rect">
+            <a:avLst/>
+          </a:prstGeom>
+          <a:noFill/>
+          <a:ln/>
+        </p:spPr>
+        <p:txBody>
+          <a:bodyPr wrap="square" lIns="0" tIns="0" rIns="0" bIns="0" rtlCol="0" anchor="ctr"/>
+          <a:lstStyle/>
+          <a:p>
+            <a:pPr indent="0" marL="0">
+              <a:buNone/>
+            </a:pPr>
+            <a:r>
+              <a:rPr lang="en-US" sz="1100" dirty="0">
+                <a:solidFill>
+                  <a:srgbClr val="1A1A1A"/>
+                </a:solidFill>
+                <a:latin typeface="Calibri" pitchFamily="34" charset="0"/>
+                <a:ea typeface="Calibri" pitchFamily="34" charset="-122"/>
+                <a:cs typeface="Calibri" pitchFamily="34" charset="-120"/>
+              </a:rPr>
+              <a:t>•  持久力の自己評価が4条件中最高（3.83）</a:t>
+            </a:r>
+            <a:endParaRPr lang="en-US" sz="1100" dirty="0"/>
+          </a:p>
+        </p:txBody>
+      </p:sp>
+      <p:sp>
+        <p:nvSpPr>
+          <p:cNvPr id="12" name="Text 10"/>
+          <p:cNvSpPr txBox="1"/>
+          <p:nvPr/>
+        </p:nvSpPr>
+        <p:spPr>
+          <a:xfrm>
+            <a:off x="822960" y="4562856"/>
+            <a:ext cx="4814316" cy="347472"/>
+          </a:xfrm>
+          <a:prstGeom prst="rect">
+            <a:avLst/>
+          </a:prstGeom>
+          <a:noFill/>
+          <a:ln/>
+        </p:spPr>
+        <p:txBody>
+          <a:bodyPr wrap="square" lIns="0" tIns="0" rIns="0" bIns="0" rtlCol="0" anchor="ctr"/>
+          <a:lstStyle/>
+          <a:p>
+            <a:pPr indent="0" marL="0">
+              <a:buNone/>
+            </a:pPr>
+            <a:r>
+              <a:rPr lang="en-US" sz="1100" dirty="0">
+                <a:solidFill>
+                  <a:srgbClr val="1A1A1A"/>
+                </a:solidFill>
+                <a:latin typeface="Calibri" pitchFamily="34" charset="0"/>
+                <a:ea typeface="Calibri" pitchFamily="34" charset="-122"/>
+                <a:cs typeface="Calibri" pitchFamily="34" charset="-120"/>
+              </a:rPr>
+              <a:t>•  消化器症状も軽微</a:t>
+            </a:r>
+            <a:endParaRPr lang="en-US" sz="1100" dirty="0"/>
+          </a:p>
+        </p:txBody>
+      </p:sp>
+      <p:sp>
+        <p:nvSpPr>
+          <p:cNvPr id="13" name="Shape 11"/>
+          <p:cNvSpPr/>
+          <p:nvPr/>
+        </p:nvSpPr>
+        <p:spPr>
+          <a:xfrm>
+            <a:off x="6277356" y="3200400"/>
+            <a:ext cx="5362956" cy="1828800"/>
+          </a:xfrm>
+          <a:prstGeom prst="roundRect">
+            <a:avLst>
+              <a:gd name="adj" fmla="val 5000"/>
+            </a:avLst>
+          </a:prstGeom>
+          <a:solidFill>
+            <a:srgbClr val="F4F7F9"/>
+          </a:solidFill>
+          <a:ln/>
+        </p:spPr>
+      </p:sp>
+      <p:sp>
+        <p:nvSpPr>
+          <p:cNvPr id="14" name="Shape 12"/>
+          <p:cNvSpPr/>
+          <p:nvPr/>
+        </p:nvSpPr>
+        <p:spPr>
+          <a:xfrm>
+            <a:off x="6551676" y="3337560"/>
+            <a:ext cx="146304" cy="347472"/>
+          </a:xfrm>
+          <a:prstGeom prst="rect">
+            <a:avLst/>
+          </a:prstGeom>
+          <a:solidFill>
+            <a:srgbClr val="EDA100"/>
+          </a:solidFill>
+          <a:ln/>
+        </p:spPr>
+      </p:sp>
+      <p:sp>
+        <p:nvSpPr>
+          <p:cNvPr id="15" name="Text 13"/>
+          <p:cNvSpPr txBox="1"/>
+          <p:nvPr/>
+        </p:nvSpPr>
+        <p:spPr>
+          <a:xfrm>
+            <a:off x="6807708" y="3300984"/>
+            <a:ext cx="4539996" cy="420624"/>
+          </a:xfrm>
+          <a:prstGeom prst="rect">
+            <a:avLst/>
+          </a:prstGeom>
+          <a:noFill/>
+          <a:ln/>
+        </p:spPr>
+        <p:txBody>
+          <a:bodyPr wrap="square" lIns="0" tIns="0" rIns="0" bIns="0" rtlCol="0" anchor="ctr"/>
+          <a:lstStyle/>
+          <a:p>
+            <a:pPr indent="0" marL="0">
+              <a:buNone/>
+            </a:pPr>
+            <a:r>
+              <a:rPr lang="en-US" sz="1400" b="1" dirty="0">
+                <a:solidFill>
+                  <a:srgbClr val="21295C"/>
+                </a:solidFill>
+                <a:latin typeface="Calibri" pitchFamily="34" charset="0"/>
+                <a:ea typeface="Calibri" pitchFamily="34" charset="-122"/>
+                <a:cs typeface="Calibri" pitchFamily="34" charset="-120"/>
+              </a:rPr>
+              <a:t>おにぎり＋糖質減</a:t>
+            </a:r>
+            <a:endParaRPr lang="en-US" sz="1400" dirty="0"/>
+          </a:p>
+        </p:txBody>
+      </p:sp>
+      <p:sp>
+        <p:nvSpPr>
+          <p:cNvPr id="16" name="Text 14"/>
+          <p:cNvSpPr txBox="1"/>
+          <p:nvPr/>
+        </p:nvSpPr>
+        <p:spPr>
+          <a:xfrm>
+            <a:off x="6551676" y="3794760"/>
+            <a:ext cx="4814316" cy="347472"/>
+          </a:xfrm>
+          <a:prstGeom prst="rect">
+            <a:avLst/>
+          </a:prstGeom>
+          <a:noFill/>
+          <a:ln/>
+        </p:spPr>
+        <p:txBody>
+          <a:bodyPr wrap="square" lIns="0" tIns="0" rIns="0" bIns="0" rtlCol="0" anchor="ctr"/>
+          <a:lstStyle/>
+          <a:p>
+            <a:pPr indent="0" marL="0">
+              <a:buNone/>
+            </a:pPr>
+            <a:r>
+              <a:rPr lang="en-US" sz="1100" dirty="0">
+                <a:solidFill>
+                  <a:srgbClr val="1A1A1A"/>
+                </a:solidFill>
+                <a:latin typeface="Calibri" pitchFamily="34" charset="0"/>
+                <a:ea typeface="Calibri" pitchFamily="34" charset="-122"/>
+                <a:cs typeface="Calibri" pitchFamily="34" charset="-120"/>
+              </a:rPr>
+              <a:t>•  波形が最もなだらか、練習中の燃料供給はむしろ4条件中最高（229）</a:t>
+            </a:r>
+            <a:endParaRPr lang="en-US" sz="1100" dirty="0"/>
+          </a:p>
+        </p:txBody>
+      </p:sp>
+      <p:sp>
+        <p:nvSpPr>
+          <p:cNvPr id="17" name="Text 15"/>
+          <p:cNvSpPr txBox="1"/>
+          <p:nvPr/>
+        </p:nvSpPr>
+        <p:spPr>
+          <a:xfrm>
+            <a:off x="6551676" y="4178808"/>
+            <a:ext cx="4814316" cy="347472"/>
+          </a:xfrm>
+          <a:prstGeom prst="rect">
+            <a:avLst/>
+          </a:prstGeom>
+          <a:noFill/>
+          <a:ln/>
+        </p:spPr>
+        <p:txBody>
+          <a:bodyPr wrap="square" lIns="0" tIns="0" rIns="0" bIns="0" rtlCol="0" anchor="ctr"/>
+          <a:lstStyle/>
+          <a:p>
+            <a:pPr indent="0" marL="0">
+              <a:buNone/>
+            </a:pPr>
+            <a:r>
+              <a:rPr lang="en-US" sz="1100" dirty="0">
+                <a:solidFill>
+                  <a:srgbClr val="1A1A1A"/>
+                </a:solidFill>
+                <a:latin typeface="Calibri" pitchFamily="34" charset="0"/>
+                <a:ea typeface="Calibri" pitchFamily="34" charset="-122"/>
+                <a:cs typeface="Calibri" pitchFamily="34" charset="-120"/>
+              </a:rPr>
+              <a:t>•  起床時コンディション・睡眠の質が4条件中最高</a:t>
+            </a:r>
+            <a:endParaRPr lang="en-US" sz="1100" dirty="0"/>
+          </a:p>
+        </p:txBody>
+      </p:sp>
+      <p:sp>
+        <p:nvSpPr>
+          <p:cNvPr id="18" name="Text 16"/>
+          <p:cNvSpPr txBox="1"/>
+          <p:nvPr/>
+        </p:nvSpPr>
+        <p:spPr>
+          <a:xfrm>
+            <a:off x="6551676" y="4562856"/>
+            <a:ext cx="4814316" cy="347472"/>
+          </a:xfrm>
+          <a:prstGeom prst="rect">
+            <a:avLst/>
+          </a:prstGeom>
+          <a:noFill/>
+          <a:ln/>
+        </p:spPr>
+        <p:txBody>
+          <a:bodyPr wrap="square" lIns="0" tIns="0" rIns="0" bIns="0" rtlCol="0" anchor="ctr"/>
+          <a:lstStyle/>
+          <a:p>
+            <a:pPr indent="0" marL="0">
+              <a:buNone/>
+            </a:pPr>
+            <a:r>
+              <a:rPr lang="en-US" sz="1100" dirty="0">
+                <a:solidFill>
+                  <a:srgbClr val="1A1A1A"/>
+                </a:solidFill>
+                <a:latin typeface="Calibri" pitchFamily="34" charset="0"/>
+                <a:ea typeface="Calibri" pitchFamily="34" charset="-122"/>
+                <a:cs typeface="Calibri" pitchFamily="34" charset="-120"/>
+              </a:rPr>
+              <a:t>•  一方で持久力・爆発力の自己評価は4条件中最低（要検証の矛盾）</a:t>
+            </a:r>
+            <a:endParaRPr lang="en-US" sz="1100" dirty="0"/>
+          </a:p>
+        </p:txBody>
+      </p:sp>
+      <p:sp>
+        <p:nvSpPr>
+          <p:cNvPr id="19" name="Shape 17"/>
+          <p:cNvSpPr/>
+          <p:nvPr/>
+        </p:nvSpPr>
+        <p:spPr>
+          <a:xfrm>
+            <a:off x="548640" y="5212080"/>
+            <a:ext cx="11091672" cy="1188720"/>
+          </a:xfrm>
+          <a:prstGeom prst="roundRect">
+            <a:avLst>
+              <a:gd name="adj" fmla="val 7692"/>
+            </a:avLst>
+          </a:prstGeom>
+          <a:solidFill>
+            <a:srgbClr val="EAF7F0"/>
+          </a:solidFill>
+          <a:ln/>
+        </p:spPr>
+      </p:sp>
+      <p:sp>
+        <p:nvSpPr>
+          <p:cNvPr id="20" name="Text 18"/>
+          <p:cNvSpPr txBox="1"/>
+          <p:nvPr/>
+        </p:nvSpPr>
+        <p:spPr>
+          <a:xfrm>
+            <a:off x="822960" y="5394960"/>
+            <a:ext cx="10543032" cy="868680"/>
+          </a:xfrm>
+          <a:prstGeom prst="rect">
+            <a:avLst/>
+          </a:prstGeom>
+          <a:noFill/>
+          <a:ln/>
+        </p:spPr>
+        <p:txBody>
+          <a:bodyPr wrap="square" lIns="0" tIns="0" rIns="0" bIns="0" rtlCol="0" anchor="ctr"/>
+          <a:lstStyle/>
+          <a:p>
+            <a:pPr indent="0" marL="0">
+              <a:buNone/>
+            </a:pPr>
+            <a:r>
+              <a:rPr lang="en-US" sz="1250" b="1" dirty="0">
+                <a:solidFill>
+                  <a:srgbClr val="0F5C3D"/>
+                </a:solidFill>
+                <a:latin typeface="Calibri" pitchFamily="34" charset="0"/>
+                <a:ea typeface="Calibri" pitchFamily="34" charset="-122"/>
+                <a:cs typeface="Calibri" pitchFamily="34" charset="-120"/>
+              </a:rPr>
+              <a:t>✓ 総合評価：現時点のデータでは「おにぎり＋スムージー（糖質ノーマル、同時摂取）」が最もバランスの良い候補。「おにぎり＋糖質減」は血糖面ではむしろ優れており、体感との矛盾を解消できれば第一候補に上がる可能性もある。</a:t>
+            </a:r>
+            <a:endParaRPr lang="en-US" sz="1250" dirty="0"/>
+          </a:p>
+        </p:txBody>
+      </p:sp>
+    </p:spTree>
+  </p:cSld>
+  <p:clrMapOvr>
+    <a:masterClrMapping/>
+  </p:clrMapOvr>
+</p:sld>
+</file>
+
+<file path=ppt/slides/slide24.xml><?xml version="1.0" encoding="utf-8"?>
+<p:sld xmlns:a="http://schemas.openxmlformats.org/drawingml/2006/main" xmlns:r="http://schemas.openxmlformats.org/officeDocument/2006/relationships" xmlns:p="http://schemas.openxmlformats.org/presentationml/2006/main">
+  <p:cSld name="Slide 24">
     <p:bg>
       <p:bgPr>
         <a:solidFill>
@@ -17369,7 +18574,7 @@
                 <a:ea typeface="Calibri" pitchFamily="34" charset="-122"/>
                 <a:cs typeface="Calibri" pitchFamily="34" charset="-120"/>
               </a:rPr>
-              <a:t>実験1：副食のみの液状化は血糖の乱高下をむしろ悪化させるが、消化器症状には差がない</a:t>
+              <a:t>実験1：副食のみの液状化は血糖の乱高下をむしろ悪化させるが、消化器症状には差がない（⚠血糖ベースラインシフトの影響下にあり参考値）</a:t>
             </a:r>
             <a:endParaRPr lang="en-US" sz="1400" dirty="0"/>
           </a:p>
@@ -17467,7 +18672,7 @@
                 <a:ea typeface="Calibri" pitchFamily="34" charset="-122"/>
                 <a:cs typeface="Calibri" pitchFamily="34" charset="-120"/>
               </a:rPr>
-              <a:t>実験2：おにぎりと副食を同時摂取する「部分的液状化」は血糖の乱高下を抑制し、糖質量の最適化でさらに改善する</a:t>
+              <a:t>実験2：おにぎりと副食を同時摂取する「部分的液状化」は血糖の乱高下を抑制し、糖質量の最適化でさらに改善する（✓シフト後で条件が揃い信頼できる）</a:t>
             </a:r>
             <a:endParaRPr lang="en-US" sz="1400" dirty="0"/>
           </a:p>
@@ -17604,7 +18809,7 @@
                 <a:ea typeface="Calibri" pitchFamily="34" charset="-122"/>
                 <a:cs typeface="Calibri" pitchFamily="34" charset="-120"/>
               </a:rPr>
-              <a:t>データ出典：for_AI_.xlsx／0824スケジュール.xlsx／condition_app_2026-08-25_2026-09-07.xlsx</a:t>
+              <a:t>データ出典：for_AI_.xlsx／0824スケジュール.xlsx／condition_app_2026-08-25_2026-09-07.xlsx／14日間_for_AI.xlsx</a:t>
             </a:r>
             <a:endParaRPr lang="en-US" sz="1000" dirty="0"/>
           </a:p>
@@ -17618,9 +18823,9 @@
 </p:sld>
 </file>
 
-<file path=ppt/slides/slide24.xml><?xml version="1.0" encoding="utf-8"?>
+<file path=ppt/slides/slide25.xml><?xml version="1.0" encoding="utf-8"?>
 <p:sld xmlns:a="http://schemas.openxmlformats.org/drawingml/2006/main" xmlns:r="http://schemas.openxmlformats.org/officeDocument/2006/relationships" xmlns:p="http://schemas.openxmlformats.org/presentationml/2006/main">
-  <p:cSld name="Slide 24">
+  <p:cSld name="Slide 25">
     <p:bg>
       <p:bgPr>
         <a:solidFill>
@@ -17812,7 +19017,7 @@
                 <a:ea typeface="Calibri" pitchFamily="34" charset="-122"/>
                 <a:cs typeface="Calibri" pitchFamily="34" charset="-120"/>
               </a:rPr>
-              <a:t>ベースライン血糖の統制</a:t>
+              <a:t>【最優先】血糖ベースラインシフトの原因究明</a:t>
             </a:r>
             <a:endParaRPr lang="en-US" sz="1450" dirty="0"/>
           </a:p>
@@ -17851,7 +19056,7 @@
                 <a:ea typeface="Calibri" pitchFamily="34" charset="-122"/>
                 <a:cs typeface="Calibri" pitchFamily="34" charset="-120"/>
               </a:rPr>
-              <a:t>8:00時点のベースライン血糖が条件間で60〜70 mg/dL異なる。前日の運動量・睡眠・センサー校正等の統制を推奨。</a:t>
+              <a:t>14日間CGMで判明したDAY5(8/29)14:50頃からの持続的シフトの原因を、選手・スタッフへの聞き取り（補食・体調・ストレスの有無）で確認する。コスト0で最大の手がかりが得られる。</a:t>
             </a:r>
             <a:endParaRPr lang="en-US" sz="1200" dirty="0"/>
           </a:p>
@@ -18276,9 +19481,9 @@
 </p:sld>
 </file>
 
-<file path=ppt/slides/slide25.xml><?xml version="1.0" encoding="utf-8"?>
+<file path=ppt/slides/slide26.xml><?xml version="1.0" encoding="utf-8"?>
 <p:sld xmlns:a="http://schemas.openxmlformats.org/drawingml/2006/main" xmlns:r="http://schemas.openxmlformats.org/officeDocument/2006/relationships" xmlns:p="http://schemas.openxmlformats.org/presentationml/2006/main">
-  <p:cSld name="Slide 25">
+  <p:cSld name="Slide 26">
     <p:bg>
       <p:bgPr>
         <a:solidFill>
